--- a/public/documents/international/project-lab/project-lab-ai-erasmus-academy-2026.pptx
+++ b/public/documents/international/project-lab/project-lab-ai-erasmus-academy-2026.pptx
@@ -13415,7 +13415,7 @@
                           <a:ea typeface="Times New Roman"/>
                           <a:cs typeface="Times New Roman"/>
                         </a:rPr>
-                        <a:t>Заявки без плагіату, що повністю відповідають вимогам EU AI Act.</a:t>
+                        <a:t>Практичні навички для підготовки оригінальних заявок із перевіркою фактів, джерел та вимог конкретного конкурсу.</a:t>
                       </a:r>
                       <a:endParaRPr>
                         <a:latin typeface="Times New Roman"/>
